--- a/AIFinanceCrashcourse/slides/Module-09-Market-Commentary-and-Dashboards.pptx
+++ b/AIFinanceCrashcourse/slides/Module-09-Market-Commentary-and-Dashboards.pptx
@@ -3267,7 +3267,7 @@
                   <a:srgbClr val="C9A227"/>
                 </a:solidFill>
               </a:rPr>
-              <a:t>ISBMS · PGDM 2025–27 · SEMESTER III · SESSION 9 OF 10</a:t>
+              <a:t>AI IN FINANCE · THE COMPLETE CRASH COURSE · MODULE 9 OF 10</a:t>
             </a:r>
           </a:p>
         </p:txBody>
@@ -3411,7 +3411,7 @@
                   <a:srgbClr val="8FA1C4"/>
                 </a:solidFill>
               </a:rPr>
-              <a:t>Faculty · Agentic AI &amp; Advanced Analytics in Finance (PGDM-SEM3-SPEC-AIFINANCE)</a:t>
+              <a:t>AI in Finance: The Complete Crash Course</a:t>
             </a:r>
           </a:p>
           <a:p>
@@ -3426,7 +3426,7 @@
                   <a:srgbClr val="C9A227"/>
                 </a:solidFill>
               </a:rPr>
-              <a:t>tejasgjadhav.github.io/AIFINANCE</a:t>
+              <a:t>tejasgjadhav.github.io/AIFinanceCrashcourse</a:t>
             </a:r>
           </a:p>
         </p:txBody>
@@ -3704,7 +3704,7 @@
                   <a:srgbClr val="8FA1C4"/>
                 </a:solidFill>
               </a:rPr>
-              <a:t>ISBMS · PGDM 2025–27 · AGENTIC AI &amp; ADVANCED ANALYTICS IN FINANCE</a:t>
+              <a:t>AI IN FINANCE · THE COMPLETE CRASH COURSE</a:t>
             </a:r>
           </a:p>
         </p:txBody>
@@ -4162,7 +4162,7 @@
                   <a:srgbClr val="C9A227"/>
                 </a:solidFill>
               </a:rPr>
-              <a:t>▪  </a:t>
+              <a:t>▪</a:t>
             </a:r>
             <a:r>
               <a:rPr sz="950" b="0">
@@ -4204,7 +4204,7 @@
                   <a:srgbClr val="C9A227"/>
                 </a:solidFill>
               </a:rPr>
-              <a:t>▪  </a:t>
+              <a:t>▪</a:t>
             </a:r>
             <a:r>
               <a:rPr sz="950" b="0">
@@ -4246,7 +4246,7 @@
                   <a:srgbClr val="C9A227"/>
                 </a:solidFill>
               </a:rPr>
-              <a:t>▪  </a:t>
+              <a:t>▪</a:t>
             </a:r>
             <a:r>
               <a:rPr sz="950" b="0">
@@ -4288,7 +4288,7 @@
                   <a:srgbClr val="C9A227"/>
                 </a:solidFill>
               </a:rPr>
-              <a:t>▪  </a:t>
+              <a:t>▪</a:t>
             </a:r>
             <a:r>
               <a:rPr sz="950" b="0">
@@ -4487,7 +4487,7 @@
                   <a:srgbClr val="C9A227"/>
                 </a:solidFill>
               </a:rPr>
-              <a:t>▪  </a:t>
+              <a:t>▪</a:t>
             </a:r>
             <a:r>
               <a:rPr sz="950" b="0">
@@ -4529,7 +4529,7 @@
                   <a:srgbClr val="C9A227"/>
                 </a:solidFill>
               </a:rPr>
-              <a:t>▪  </a:t>
+              <a:t>▪</a:t>
             </a:r>
             <a:r>
               <a:rPr sz="950" b="0">
@@ -4571,7 +4571,7 @@
                   <a:srgbClr val="C9A227"/>
                 </a:solidFill>
               </a:rPr>
-              <a:t>▪  </a:t>
+              <a:t>▪</a:t>
             </a:r>
             <a:r>
               <a:rPr sz="950" b="0">
@@ -4613,7 +4613,7 @@
                   <a:srgbClr val="C9A227"/>
                 </a:solidFill>
               </a:rPr>
-              <a:t>▪  </a:t>
+              <a:t>▪</a:t>
             </a:r>
             <a:r>
               <a:rPr sz="950" b="0">
@@ -4812,7 +4812,7 @@
                   <a:srgbClr val="C9A227"/>
                 </a:solidFill>
               </a:rPr>
-              <a:t>▪  </a:t>
+              <a:t>▪</a:t>
             </a:r>
             <a:r>
               <a:rPr sz="950" b="0">
@@ -4854,7 +4854,7 @@
                   <a:srgbClr val="C9A227"/>
                 </a:solidFill>
               </a:rPr>
-              <a:t>▪  </a:t>
+              <a:t>▪</a:t>
             </a:r>
             <a:r>
               <a:rPr sz="950" b="0">
@@ -4896,7 +4896,7 @@
                   <a:srgbClr val="C9A227"/>
                 </a:solidFill>
               </a:rPr>
-              <a:t>▪  </a:t>
+              <a:t>▪</a:t>
             </a:r>
             <a:r>
               <a:rPr sz="950" b="0">
@@ -4938,7 +4938,7 @@
                   <a:srgbClr val="C9A227"/>
                 </a:solidFill>
               </a:rPr>
-              <a:t>▪  </a:t>
+              <a:t>▪</a:t>
             </a:r>
             <a:r>
               <a:rPr sz="950" b="0">
@@ -4980,7 +4980,7 @@
                   <a:srgbClr val="5D6B7E"/>
                 </a:solidFill>
               </a:rPr>
-              <a:t>ISBMS · PGDM 2025–27 · AGENTIC AI &amp; ADVANCED ANALYTICS IN FINANCE</a:t>
+              <a:t>AI IN FINANCE · THE COMPLETE CRASH COURSE</a:t>
             </a:r>
           </a:p>
         </p:txBody>
@@ -5290,7 +5290,7 @@
                   <a:srgbClr val="C9A227"/>
                 </a:solidFill>
               </a:rPr>
-              <a:t>TIP  </a:t>
+              <a:t>TIP</a:t>
             </a:r>
             <a:r>
               <a:rPr sz="900" b="0">
@@ -5470,7 +5470,7 @@
                   <a:srgbClr val="C9A227"/>
                 </a:solidFill>
               </a:rPr>
-              <a:t>TIP  </a:t>
+              <a:t>TIP</a:t>
             </a:r>
             <a:r>
               <a:rPr sz="900" b="0">
@@ -5650,7 +5650,7 @@
                   <a:srgbClr val="C9A227"/>
                 </a:solidFill>
               </a:rPr>
-              <a:t>TIP  </a:t>
+              <a:t>TIP</a:t>
             </a:r>
             <a:r>
               <a:rPr sz="900" b="0">
@@ -5830,7 +5830,7 @@
                   <a:srgbClr val="C9A227"/>
                 </a:solidFill>
               </a:rPr>
-              <a:t>TIP  </a:t>
+              <a:t>TIP</a:t>
             </a:r>
             <a:r>
               <a:rPr sz="900" b="0">
@@ -6010,7 +6010,7 @@
                   <a:srgbClr val="C9A227"/>
                 </a:solidFill>
               </a:rPr>
-              <a:t>TIP  </a:t>
+              <a:t>TIP</a:t>
             </a:r>
             <a:r>
               <a:rPr sz="900" b="0">
@@ -6190,7 +6190,7 @@
                   <a:srgbClr val="C9A227"/>
                 </a:solidFill>
               </a:rPr>
-              <a:t>TIP  </a:t>
+              <a:t>TIP</a:t>
             </a:r>
             <a:r>
               <a:rPr sz="900" b="0">
@@ -6370,7 +6370,7 @@
                   <a:srgbClr val="C9A227"/>
                 </a:solidFill>
               </a:rPr>
-              <a:t>TIP  </a:t>
+              <a:t>TIP</a:t>
             </a:r>
             <a:r>
               <a:rPr sz="900" b="0">
@@ -6500,7 +6500,7 @@
                   <a:srgbClr val="C9A227"/>
                 </a:solidFill>
               </a:rPr>
-              <a:t>Before Session 10:  </a:t>
+              <a:t>Before Session 10:</a:t>
             </a:r>
             <a:r>
               <a:rPr sz="1100" b="0">
@@ -6906,7 +6906,7 @@
                   <a:srgbClr val="C9A227"/>
                 </a:solidFill>
               </a:rPr>
-              <a:t>▪  </a:t>
+              <a:t>▪</a:t>
             </a:r>
             <a:r>
               <a:rPr sz="1000" b="0">
@@ -6948,7 +6948,7 @@
                   <a:srgbClr val="C9A227"/>
                 </a:solidFill>
               </a:rPr>
-              <a:t>▪  </a:t>
+              <a:t>▪</a:t>
             </a:r>
             <a:r>
               <a:rPr sz="1000" b="0">
@@ -6990,7 +6990,7 @@
                   <a:srgbClr val="C9A227"/>
                 </a:solidFill>
               </a:rPr>
-              <a:t>▪  </a:t>
+              <a:t>▪</a:t>
             </a:r>
             <a:r>
               <a:rPr sz="1000" b="0">
@@ -7032,7 +7032,7 @@
                   <a:srgbClr val="C9A227"/>
                 </a:solidFill>
               </a:rPr>
-              <a:t>▪  </a:t>
+              <a:t>▪</a:t>
             </a:r>
             <a:r>
               <a:rPr sz="1000" b="0">
@@ -7231,7 +7231,7 @@
                   <a:srgbClr val="C9A227"/>
                 </a:solidFill>
               </a:rPr>
-              <a:t>▪  </a:t>
+              <a:t>▪</a:t>
             </a:r>
             <a:r>
               <a:rPr sz="1000" b="0">
@@ -7273,7 +7273,7 @@
                   <a:srgbClr val="C9A227"/>
                 </a:solidFill>
               </a:rPr>
-              <a:t>▪  </a:t>
+              <a:t>▪</a:t>
             </a:r>
             <a:r>
               <a:rPr sz="1000" b="0">
@@ -7315,7 +7315,7 @@
                   <a:srgbClr val="C9A227"/>
                 </a:solidFill>
               </a:rPr>
-              <a:t>▪  </a:t>
+              <a:t>▪</a:t>
             </a:r>
             <a:r>
               <a:rPr sz="1000" b="0">
@@ -7357,7 +7357,7 @@
                   <a:srgbClr val="C9A227"/>
                 </a:solidFill>
               </a:rPr>
-              <a:t>▪  </a:t>
+              <a:t>▪</a:t>
             </a:r>
             <a:r>
               <a:rPr sz="1000" b="0">
@@ -7556,7 +7556,7 @@
                   <a:srgbClr val="C9A227"/>
                 </a:solidFill>
               </a:rPr>
-              <a:t>▪  </a:t>
+              <a:t>▪</a:t>
             </a:r>
             <a:r>
               <a:rPr sz="1000" b="0">
@@ -7598,7 +7598,7 @@
                   <a:srgbClr val="C9A227"/>
                 </a:solidFill>
               </a:rPr>
-              <a:t>▪  </a:t>
+              <a:t>▪</a:t>
             </a:r>
             <a:r>
               <a:rPr sz="1000" b="0">
@@ -7640,7 +7640,7 @@
                   <a:srgbClr val="C9A227"/>
                 </a:solidFill>
               </a:rPr>
-              <a:t>▪  </a:t>
+              <a:t>▪</a:t>
             </a:r>
             <a:r>
               <a:rPr sz="1000" b="0">
@@ -7682,7 +7682,7 @@
                   <a:srgbClr val="C9A227"/>
                 </a:solidFill>
               </a:rPr>
-              <a:t>▪  </a:t>
+              <a:t>▪</a:t>
             </a:r>
             <a:r>
               <a:rPr sz="1000" b="0">
@@ -7812,7 +7812,7 @@
                   <a:srgbClr val="3A5C9E"/>
                 </a:solidFill>
               </a:rPr>
-              <a:t>EVERYTHING TODAY IS FREE.  </a:t>
+              <a:t>EVERYTHING TODAY IS FREE.</a:t>
             </a:r>
             <a:r>
               <a:rPr sz="1100" b="0">
@@ -7942,7 +7942,7 @@
                   <a:srgbClr val="C9A227"/>
                 </a:solidFill>
               </a:rPr>
-              <a:t>The whole module in one line:  </a:t>
+              <a:t>The whole module in one line:</a:t>
             </a:r>
             <a:r>
               <a:rPr sz="1200" b="0">
@@ -7984,7 +7984,7 @@
                   <a:srgbClr val="5D6B7E"/>
                 </a:solidFill>
               </a:rPr>
-              <a:t>ISBMS · PGDM 2025–27 · AGENTIC AI &amp; ADVANCED ANALYTICS IN FINANCE</a:t>
+              <a:t>AI IN FINANCE · THE COMPLETE CRASH COURSE</a:t>
             </a:r>
           </a:p>
         </p:txBody>
@@ -8338,7 +8338,7 @@
                   <a:srgbClr val="C9A227"/>
                 </a:solidFill>
               </a:rPr>
-              <a:t>▪  </a:t>
+              <a:t>▪</a:t>
             </a:r>
             <a:r>
               <a:rPr sz="1000" b="0">
@@ -8380,7 +8380,7 @@
                   <a:srgbClr val="C9A227"/>
                 </a:solidFill>
               </a:rPr>
-              <a:t>▪  </a:t>
+              <a:t>▪</a:t>
             </a:r>
             <a:r>
               <a:rPr sz="1000" b="0">
@@ -8422,7 +8422,7 @@
                   <a:srgbClr val="C9A227"/>
                 </a:solidFill>
               </a:rPr>
-              <a:t>▪  </a:t>
+              <a:t>▪</a:t>
             </a:r>
             <a:r>
               <a:rPr sz="1000" b="0">
@@ -8621,7 +8621,7 @@
                   <a:srgbClr val="C9A227"/>
                 </a:solidFill>
               </a:rPr>
-              <a:t>▪  </a:t>
+              <a:t>▪</a:t>
             </a:r>
             <a:r>
               <a:rPr sz="1000" b="0">
@@ -8663,7 +8663,7 @@
                   <a:srgbClr val="C9A227"/>
                 </a:solidFill>
               </a:rPr>
-              <a:t>▪  </a:t>
+              <a:t>▪</a:t>
             </a:r>
             <a:r>
               <a:rPr sz="1000" b="0">
@@ -8705,7 +8705,7 @@
                   <a:srgbClr val="C9A227"/>
                 </a:solidFill>
               </a:rPr>
-              <a:t>▪  </a:t>
+              <a:t>▪</a:t>
             </a:r>
             <a:r>
               <a:rPr sz="1000" b="0">
@@ -8904,7 +8904,7 @@
                   <a:srgbClr val="C9A227"/>
                 </a:solidFill>
               </a:rPr>
-              <a:t>▪  </a:t>
+              <a:t>▪</a:t>
             </a:r>
             <a:r>
               <a:rPr sz="1000" b="0">
@@ -8946,7 +8946,7 @@
                   <a:srgbClr val="C9A227"/>
                 </a:solidFill>
               </a:rPr>
-              <a:t>▪  </a:t>
+              <a:t>▪</a:t>
             </a:r>
             <a:r>
               <a:rPr sz="1000" b="0">
@@ -8988,7 +8988,7 @@
                   <a:srgbClr val="C9A227"/>
                 </a:solidFill>
               </a:rPr>
-              <a:t>▪  </a:t>
+              <a:t>▪</a:t>
             </a:r>
             <a:r>
               <a:rPr sz="1000" b="0">
@@ -9183,7 +9183,7 @@
                   <a:srgbClr val="5D6B7E"/>
                 </a:solidFill>
               </a:rPr>
-              <a:t>ISBMS · PGDM 2025–27 · AGENTIC AI &amp; ADVANCED ANALYTICS IN FINANCE</a:t>
+              <a:t>AI IN FINANCE · THE COMPLETE CRASH COURSE</a:t>
             </a:r>
           </a:p>
         </p:txBody>
@@ -9503,7 +9503,7 @@
                   <a:srgbClr val="C9A227"/>
                 </a:solidFill>
               </a:rPr>
-              <a:t>▪  </a:t>
+              <a:t>▪</a:t>
             </a:r>
             <a:r>
               <a:rPr sz="950" b="0">
@@ -9545,7 +9545,7 @@
                   <a:srgbClr val="C9A227"/>
                 </a:solidFill>
               </a:rPr>
-              <a:t>▪  </a:t>
+              <a:t>▪</a:t>
             </a:r>
             <a:r>
               <a:rPr sz="950" b="0">
@@ -9587,7 +9587,7 @@
                   <a:srgbClr val="C9A227"/>
                 </a:solidFill>
               </a:rPr>
-              <a:t>▪  </a:t>
+              <a:t>▪</a:t>
             </a:r>
             <a:r>
               <a:rPr sz="950" b="0">
@@ -9629,7 +9629,7 @@
                   <a:srgbClr val="C9A227"/>
                 </a:solidFill>
               </a:rPr>
-              <a:t>▪  </a:t>
+              <a:t>▪</a:t>
             </a:r>
             <a:r>
               <a:rPr sz="950" b="0">
@@ -9828,7 +9828,7 @@
                   <a:srgbClr val="C9A227"/>
                 </a:solidFill>
               </a:rPr>
-              <a:t>▪  </a:t>
+              <a:t>▪</a:t>
             </a:r>
             <a:r>
               <a:rPr sz="950" b="0">
@@ -9870,7 +9870,7 @@
                   <a:srgbClr val="C9A227"/>
                 </a:solidFill>
               </a:rPr>
-              <a:t>▪  </a:t>
+              <a:t>▪</a:t>
             </a:r>
             <a:r>
               <a:rPr sz="950" b="0">
@@ -9912,7 +9912,7 @@
                   <a:srgbClr val="C9A227"/>
                 </a:solidFill>
               </a:rPr>
-              <a:t>▪  </a:t>
+              <a:t>▪</a:t>
             </a:r>
             <a:r>
               <a:rPr sz="950" b="0">
@@ -9954,7 +9954,7 @@
                   <a:srgbClr val="C9A227"/>
                 </a:solidFill>
               </a:rPr>
-              <a:t>▪  </a:t>
+              <a:t>▪</a:t>
             </a:r>
             <a:r>
               <a:rPr sz="950" b="0">
@@ -10153,7 +10153,7 @@
                   <a:srgbClr val="C9A227"/>
                 </a:solidFill>
               </a:rPr>
-              <a:t>▪  </a:t>
+              <a:t>▪</a:t>
             </a:r>
             <a:r>
               <a:rPr sz="950" b="0">
@@ -10195,7 +10195,7 @@
                   <a:srgbClr val="C9A227"/>
                 </a:solidFill>
               </a:rPr>
-              <a:t>▪  </a:t>
+              <a:t>▪</a:t>
             </a:r>
             <a:r>
               <a:rPr sz="950" b="0">
@@ -10237,7 +10237,7 @@
                   <a:srgbClr val="C9A227"/>
                 </a:solidFill>
               </a:rPr>
-              <a:t>▪  </a:t>
+              <a:t>▪</a:t>
             </a:r>
             <a:r>
               <a:rPr sz="950" b="0">
@@ -10279,7 +10279,7 @@
                   <a:srgbClr val="C9A227"/>
                 </a:solidFill>
               </a:rPr>
-              <a:t>▪  </a:t>
+              <a:t>▪</a:t>
             </a:r>
             <a:r>
               <a:rPr sz="950" b="0">
@@ -10546,7 +10546,7 @@
                   <a:srgbClr val="C9A227"/>
                 </a:solidFill>
               </a:rPr>
-              <a:t>The output of scoring is a number:  </a:t>
+              <a:t>The output of scoring is a number:</a:t>
             </a:r>
             <a:r>
               <a:rPr sz="1200" b="0">
@@ -10588,7 +10588,7 @@
                   <a:srgbClr val="5D6B7E"/>
                 </a:solidFill>
               </a:rPr>
-              <a:t>ISBMS · PGDM 2025–27 · AGENTIC AI &amp; ADVANCED ANALYTICS IN FINANCE</a:t>
+              <a:t>AI IN FINANCE · THE COMPLETE CRASH COURSE</a:t>
             </a:r>
           </a:p>
         </p:txBody>
@@ -11546,7 +11546,7 @@
                 </a:solidFill>
                 <a:latin typeface="Georgia"/>
               </a:rPr>
-              <a:t>NEXT YEAR'S CASH FLOW  =  THIS YEAR'S  ×  (1 + GROWTH)      </a:t>
+              <a:t>NEXT YEAR'S CASH FLOW  =  THIS YEAR'S  ×  (1 + GROWTH)</a:t>
             </a:r>
             <a:r>
               <a:rPr sz="1400" b="1">
@@ -12148,7 +12148,7 @@
                   <a:srgbClr val="C9A227"/>
                 </a:solidFill>
               </a:rPr>
-              <a:t>Comparables are the second opinion:  </a:t>
+              <a:t>Comparables are the second opinion:</a:t>
             </a:r>
             <a:r>
               <a:rPr sz="1200" b="0">
@@ -12190,7 +12190,7 @@
                   <a:srgbClr val="5D6B7E"/>
                 </a:solidFill>
               </a:rPr>
-              <a:t>ISBMS · PGDM 2025–27 · AGENTIC AI &amp; ADVANCED ANALYTICS IN FINANCE</a:t>
+              <a:t>AI IN FINANCE · THE COMPLETE CRASH COURSE</a:t>
             </a:r>
           </a:p>
         </p:txBody>
@@ -13499,7 +13499,7 @@
                   <a:srgbClr val="C9A227"/>
                 </a:solidFill>
               </a:rPr>
-              <a:t>One design rule matters more than the rest:  </a:t>
+              <a:t>One design rule matters more than the rest:</a:t>
             </a:r>
             <a:r>
               <a:rPr sz="1200" b="0">
@@ -13541,7 +13541,7 @@
                   <a:srgbClr val="5D6B7E"/>
                 </a:solidFill>
               </a:rPr>
-              <a:t>ISBMS · PGDM 2025–27 · AGENTIC AI &amp; ADVANCED ANALYTICS IN FINANCE</a:t>
+              <a:t>AI IN FINANCE · THE COMPLETE CRASH COURSE</a:t>
             </a:r>
           </a:p>
         </p:txBody>
@@ -14081,7 +14081,7 @@
                 </a:solidFill>
                 <a:latin typeface="Consolas"/>
               </a:rPr>
-              <a:t> </a:t>
+              <a:t/>
             </a:r>
           </a:p>
           <a:p>
@@ -14105,7 +14105,7 @@
                 </a:solidFill>
                 <a:latin typeface="Consolas"/>
               </a:rPr>
-              <a:t>  Year 1   FCF $72.3bn   PV $66.4bn</a:t>
+              <a:t>Year 1   FCF $72.3bn   PV $66.4bn</a:t>
             </a:r>
           </a:p>
           <a:p>
@@ -14117,7 +14117,7 @@
                 </a:solidFill>
                 <a:latin typeface="Consolas"/>
               </a:rPr>
-              <a:t>  Year 5   FCF $98.4bn   PV $64.0bn</a:t>
+              <a:t>Year 5   FCF $98.4bn   PV $64.0bn</a:t>
             </a:r>
           </a:p>
           <a:p>
@@ -14129,7 +14129,7 @@
                 </a:solidFill>
                 <a:latin typeface="Consolas"/>
               </a:rPr>
-              <a:t>  PV of years 1-5      $325.8bn</a:t>
+              <a:t>PV of years 1-5      $325.8bn</a:t>
             </a:r>
           </a:p>
           <a:p>
@@ -14141,7 +14141,7 @@
                 </a:solidFill>
                 <a:latin typeface="Consolas"/>
               </a:rPr>
-              <a:t>  PV of terminal value $1,008.8bn  (76% of enterprise value)</a:t>
+              <a:t>PV of terminal value $1,008.8bn  (76% of enterprise value)</a:t>
             </a:r>
           </a:p>
           <a:p>
@@ -14153,7 +14153,7 @@
                 </a:solidFill>
                 <a:latin typeface="Consolas"/>
               </a:rPr>
-              <a:t>  Enterprise value     $1,334.6bn</a:t>
+              <a:t>Enterprise value     $1,334.6bn</a:t>
             </a:r>
           </a:p>
           <a:p>
@@ -14165,7 +14165,7 @@
                 </a:solidFill>
                 <a:latin typeface="Consolas"/>
               </a:rPr>
-              <a:t>  Equity value         $1,282.6bn</a:t>
+              <a:t>Equity value         $1,282.6bn</a:t>
             </a:r>
           </a:p>
           <a:p>
@@ -14177,7 +14177,7 @@
                 </a:solidFill>
                 <a:latin typeface="Consolas"/>
               </a:rPr>
-              <a:t>  Value per share      $172.73  vs close $493.78  (-65.0%)</a:t>
+              <a:t>Value per share      $172.73  vs close $493.78  (-65.0%)</a:t>
             </a:r>
           </a:p>
           <a:p>
@@ -14189,7 +14189,7 @@
                 </a:solidFill>
                 <a:latin typeface="Consolas"/>
               </a:rPr>
-              <a:t> </a:t>
+              <a:t/>
             </a:r>
           </a:p>
           <a:p>
@@ -14213,7 +14213,7 @@
                 </a:solidFill>
                 <a:latin typeface="Consolas"/>
               </a:rPr>
-              <a:t>       g=2.0%  g=2.5%  g=3.0%</a:t>
+              <a:t>g=2.0%  g=2.5%  g=3.0%</a:t>
             </a:r>
           </a:p>
           <a:p>
@@ -14371,7 +14371,7 @@
                   <a:srgbClr val="C9A227"/>
                 </a:solidFill>
               </a:rPr>
-              <a:t>The model says $172.73 and the market says $493.78. Neither is wrong:  </a:t>
+              <a:t>The model says $172.73 and the market says $493.78. Neither is wrong:</a:t>
             </a:r>
             <a:r>
               <a:rPr sz="1200" b="0">
@@ -14413,7 +14413,7 @@
                   <a:srgbClr val="5D6B7E"/>
                 </a:solidFill>
               </a:rPr>
-              <a:t>ISBMS · PGDM 2025–27 · AGENTIC AI &amp; ADVANCED ANALYTICS IN FINANCE</a:t>
+              <a:t>AI IN FINANCE · THE COMPLETE CRASH COURSE</a:t>
             </a:r>
           </a:p>
         </p:txBody>
@@ -15206,7 +15206,7 @@
                   <a:srgbClr val="C9A227"/>
                 </a:solidFill>
               </a:rPr>
-              <a:t>The first two paragraphs were correct, including two subtractions it did itself:  </a:t>
+              <a:t>The first two paragraphs were correct, including two subtractions it did itself:</a:t>
             </a:r>
             <a:r>
               <a:rPr sz="1200" b="0">
@@ -15248,7 +15248,7 @@
                   <a:srgbClr val="5D6B7E"/>
                 </a:solidFill>
               </a:rPr>
-              <a:t>ISBMS · PGDM 2025–27 · AGENTIC AI &amp; ADVANCED ANALYTICS IN FINANCE</a:t>
+              <a:t>AI IN FINANCE · THE COMPLETE CRASH COURSE</a:t>
             </a:r>
           </a:p>
         </p:txBody>
@@ -15706,7 +15706,7 @@
                   <a:srgbClr val="C9A227"/>
                 </a:solidFill>
               </a:rPr>
-              <a:t>▪  </a:t>
+              <a:t>▪</a:t>
             </a:r>
             <a:r>
               <a:rPr sz="950" b="0">
@@ -15748,7 +15748,7 @@
                   <a:srgbClr val="C9A227"/>
                 </a:solidFill>
               </a:rPr>
-              <a:t>▪  </a:t>
+              <a:t>▪</a:t>
             </a:r>
             <a:r>
               <a:rPr sz="950" b="0">
@@ -15790,7 +15790,7 @@
                   <a:srgbClr val="C9A227"/>
                 </a:solidFill>
               </a:rPr>
-              <a:t>▪  </a:t>
+              <a:t>▪</a:t>
             </a:r>
             <a:r>
               <a:rPr sz="950" b="0">
@@ -15989,7 +15989,7 @@
                   <a:srgbClr val="C9A227"/>
                 </a:solidFill>
               </a:rPr>
-              <a:t>▪  </a:t>
+              <a:t>▪</a:t>
             </a:r>
             <a:r>
               <a:rPr sz="950" b="0">
@@ -16031,7 +16031,7 @@
                   <a:srgbClr val="C9A227"/>
                 </a:solidFill>
               </a:rPr>
-              <a:t>▪  </a:t>
+              <a:t>▪</a:t>
             </a:r>
             <a:r>
               <a:rPr sz="950" b="0">
@@ -16073,7 +16073,7 @@
                   <a:srgbClr val="C9A227"/>
                 </a:solidFill>
               </a:rPr>
-              <a:t>▪  </a:t>
+              <a:t>▪</a:t>
             </a:r>
             <a:r>
               <a:rPr sz="950" b="0">
@@ -16272,7 +16272,7 @@
                   <a:srgbClr val="C9A227"/>
                 </a:solidFill>
               </a:rPr>
-              <a:t>▪  </a:t>
+              <a:t>▪</a:t>
             </a:r>
             <a:r>
               <a:rPr sz="950" b="0">
@@ -16314,7 +16314,7 @@
                   <a:srgbClr val="C9A227"/>
                 </a:solidFill>
               </a:rPr>
-              <a:t>▪  </a:t>
+              <a:t>▪</a:t>
             </a:r>
             <a:r>
               <a:rPr sz="950" b="0">
@@ -16356,7 +16356,7 @@
                   <a:srgbClr val="C9A227"/>
                 </a:solidFill>
               </a:rPr>
-              <a:t>▪  </a:t>
+              <a:t>▪</a:t>
             </a:r>
             <a:r>
               <a:rPr sz="950" b="0">
@@ -16535,7 +16535,7 @@
                   <a:srgbClr val="5D6B7E"/>
                 </a:solidFill>
               </a:rPr>
-              <a:t>ISBMS · PGDM 2025–27 · AGENTIC AI &amp; ADVANCED ANALYTICS IN FINANCE</a:t>
+              <a:t>AI IN FINANCE · THE COMPLETE CRASH COURSE</a:t>
             </a:r>
           </a:p>
         </p:txBody>
